--- a/docs/webinars/02-the-newsletter-studio.pptx
+++ b/docs/webinars/02-the-newsletter-studio.pptx
@@ -512,7 +512,7 @@
           <a:p>
             <a:r>
               <a:rPr lang="en-US" dirty="0"/>
-              <a:t>This session covers the newsletter studio end to end: writing a story, the two formatting tricks, publishing, checking your work, and fixing mistakes. It takes 10–15 minutes to publish a typical story once you've done it twice.</a:t>
+              <a:t>This session covers the newsletter studio end to end: writing a story, the two formatting tricks, publishing, checking your work, and fixing mistakes. It takes 10 to 15 minutes to publish a typical story once you've done it twice.</a:t>
             </a:r>
             <a:endParaRPr lang="en-US" dirty="0"/>
           </a:p>
@@ -600,7 +600,7 @@
           <a:p>
             <a:r>
               <a:rPr lang="en-US" dirty="0"/>
-              <a:t>Underneath, Claude adds image and imageAlt lines to the story's file — the composer doesn't expose those fields, which is fine: this keeps the common path simple.</a:t>
+              <a:t>Underneath, Claude adds image and imageAlt lines to the story's file. The composer doesn't expose those fields, which is fine: this keeps the common path simple.</a:t>
             </a:r>
             <a:endParaRPr lang="en-US" dirty="0"/>
           </a:p>
@@ -776,7 +776,7 @@
           <a:p>
             <a:r>
               <a:rPr lang="en-US" dirty="0"/>
-              <a:t>Set expectations: publishing is genuinely a 10-minute job. The only rule that matters is at step 4 — publishing is immediate and public, so agree the text before it goes in the box.</a:t>
+              <a:t>Set expectations: publishing is genuinely a 10-minute job. The only rule that matters is at step 4. Publishing is immediate and public, so agree the text before it goes in the box.</a:t>
             </a:r>
             <a:endParaRPr lang="en-US" dirty="0"/>
           </a:p>
@@ -864,7 +864,7 @@
           <a:p>
             <a:r>
               <a:rPr lang="en-US" dirty="0"/>
-              <a:t>Show the live /news page in the browser if presenting with a connection. Mention the story address format — the title becomes the web address, which is why short factual titles work best.</a:t>
+              <a:t>Show the live /news page in the browser if presenting with a connection. Mention the story address format: the title becomes the web address, which is why short factual titles work best.</a:t>
             </a:r>
             <a:endParaRPr lang="en-US" dirty="0"/>
           </a:p>
@@ -952,7 +952,7 @@
           <a:p>
             <a:r>
               <a:rPr lang="en-US" dirty="0"/>
-              <a:t>Walk the six numbered markers on the screenshot in order. All four boxes must be filled before Publish will work — the form tells you if one is missing.</a:t>
+              <a:t>Walk the six numbered markers on the screenshot in order. All four boxes must be filled before Publish will work; the form tells you if one is missing.</a:t>
             </a:r>
             <a:endParaRPr lang="en-US" dirty="0"/>
           </a:p>
@@ -1216,7 +1216,7 @@
           <a:p>
             <a:r>
               <a:rPr lang="en-US" dirty="0"/>
-              <a:t>If the audience hasn't seen webinar 01, spend a minute on what a Claude session is. The overwrite refusal surprises people — frame it as protection, not a bug.</a:t>
+              <a:t>If the audience hasn't seen webinar 01, spend a minute on what a Claude session is. The overwrite refusal surprises people; frame it as protection, not a bug.</a:t>
             </a:r>
             <a:endParaRPr lang="en-US" dirty="0"/>
           </a:p>
@@ -1304,7 +1304,7 @@
           <a:p>
             <a:r>
               <a:rPr lang="en-US" dirty="0"/>
-              <a:t>This is the guide's “Making changes stick on live hosting” routine applied to news. The error message is the site being honest, not failing — that reframe removes the panic.</a:t>
+              <a:t>This is the guide's “Making changes stick on live hosting” routine applied to news. The error message is the site being honest, not failing. That reframe removes the panic.</a:t>
             </a:r>
             <a:endParaRPr lang="en-US" dirty="0"/>
           </a:p>
@@ -1867,7 +1867,7 @@
                 <a:ea typeface="Work Sans" pitchFamily="34" charset="-122"/>
                 <a:cs typeface="Work Sans" pitchFamily="34" charset="-120"/>
               </a:rPr>
-              <a:t>SATIS GROUP — BACKEND WEBINAR SERIES</a:t>
+              <a:t>SATIS GROUP · BACKEND WEBINAR SERIES</a:t>
             </a:r>
             <a:endParaRPr lang="en-US" sz="950" dirty="0"/>
           </a:p>
@@ -2269,7 +2269,7 @@
                 <a:ea typeface="Work Sans" pitchFamily="34" charset="-122"/>
                 <a:cs typeface="Work Sans" pitchFamily="34" charset="-120"/>
               </a:rPr>
-              <a:t>SATIS GROUP — THE NEWSLETTER STUDIO</a:t>
+              <a:t>SATIS GROUP · THE NEWSLETTER STUDIO</a:t>
             </a:r>
             <a:endParaRPr lang="en-US" sz="700" dirty="0"/>
           </a:p>
@@ -2529,7 +2529,7 @@
                 <a:ea typeface="Work Sans" pitchFamily="34" charset="-122"/>
                 <a:cs typeface="Work Sans" pitchFamily="34" charset="-120"/>
               </a:rPr>
-              <a:t>Words first — the image is an addition, not a requirement. Stories without images use the house thumbnails.</a:t>
+              <a:t>Words first. The image is an addition, not a requirement; stories without images use the house thumbnails.</a:t>
             </a:r>
             <a:endParaRPr lang="en-US" sz="1050" dirty="0"/>
           </a:p>
@@ -2934,7 +2934,7 @@
                 <a:ea typeface="Work Sans" pitchFamily="34" charset="-122"/>
                 <a:cs typeface="Work Sans" pitchFamily="34" charset="-120"/>
               </a:rPr>
-              <a:t>One sentence describing the picture for someone who cannot see it — “Topping-out ceremony at The Courthouse, Macclesfield” — helps accessibility and search alike.</a:t>
+              <a:t>One sentence describing the picture for someone who cannot see it, e.g. “Topping-out ceremony at The Courthouse, Macclesfield”. It helps accessibility and search alike.</a:t>
             </a:r>
             <a:endParaRPr lang="en-US" sz="1100" dirty="0"/>
           </a:p>
@@ -3145,7 +3145,7 @@
                 <a:ea typeface="Work Sans" pitchFamily="34" charset="-122"/>
                 <a:cs typeface="Work Sans" pitchFamily="34" charset="-120"/>
               </a:rPr>
-              <a:t>SATIS GROUP — THE NEWSLETTER STUDIO</a:t>
+              <a:t>SATIS GROUP · THE NEWSLETTER STUDIO</a:t>
             </a:r>
             <a:endParaRPr lang="en-US" sz="700" dirty="0"/>
           </a:p>
@@ -3269,7 +3269,7 @@
                 <a:ea typeface="Work Sans" pitchFamily="34" charset="-122"/>
                 <a:cs typeface="Work Sans" pitchFamily="34" charset="-120"/>
               </a:rPr>
-              <a:t>Four boxes, one button — and the story is live on /news immediately.</a:t>
+              <a:t>Four boxes, one button, and the story is live on /news immediately.</a:t>
             </a:r>
             <a:endParaRPr lang="en-US" sz="1250" dirty="0"/>
           </a:p>
@@ -3341,7 +3341,7 @@
                 <a:ea typeface="Work Sans" pitchFamily="34" charset="-122"/>
                 <a:cs typeface="Work Sans" pitchFamily="34" charset="-120"/>
               </a:rPr>
-              <a:t>Corrections go through Claude — the studio refuses to overwrite live stories.</a:t>
+              <a:t>Corrections go through Claude; the studio refuses to overwrite live stories.</a:t>
             </a:r>
             <a:endParaRPr lang="en-US" sz="1250" dirty="0"/>
           </a:p>
@@ -3365,7 +3365,7 @@
                 <a:ea typeface="Work Sans" pitchFamily="34" charset="-122"/>
                 <a:cs typeface="Work Sans" pitchFamily="34" charset="-120"/>
               </a:rPr>
-              <a:t>On the live site, publishing goes through the repository — “Could not write” means use the Claude route.</a:t>
+              <a:t>On the live site, publishing goes through the repository. “Could not write” means use the Claude route.</a:t>
             </a:r>
             <a:endParaRPr lang="en-US" sz="1250" dirty="0"/>
           </a:p>
@@ -3800,7 +3800,7 @@
                 <a:ea typeface="Work Sans" pitchFamily="34" charset="-122"/>
                 <a:cs typeface="Work Sans" pitchFamily="34" charset="-120"/>
               </a:rPr>
-              <a:t>SATIS GROUP — THE NEWSLETTER STUDIO</a:t>
+              <a:t>SATIS GROUP · THE NEWSLETTER STUDIO</a:t>
             </a:r>
             <a:endParaRPr lang="en-US" sz="700" dirty="0"/>
           </a:p>
@@ -3920,7 +3920,7 @@
                 <a:ea typeface="Work Sans" pitchFamily="34" charset="-122"/>
                 <a:cs typeface="Work Sans" pitchFamily="34" charset="-120"/>
               </a:rPr>
-              <a:t>Everything about news stories — the site calls them “issues”. You need to be signed in to the admin area, and a story to tell.</a:t>
+              <a:t>Everything about news stories (the site calls them “issues”). You need to be signed in to the admin area, and a story to tell.</a:t>
             </a:r>
             <a:endParaRPr lang="en-US" sz="1150" dirty="0"/>
           </a:p>
@@ -4400,7 +4400,7 @@
                 <a:ea typeface="Work Sans" pitchFamily="34" charset="-122"/>
                 <a:cs typeface="Work Sans" pitchFamily="34" charset="-120"/>
               </a:rPr>
-              <a:t>It goes live immediately — and how to verify.</a:t>
+              <a:t>It goes live immediately, and how to verify.</a:t>
             </a:r>
             <a:endParaRPr lang="en-US" sz="950" dirty="0"/>
           </a:p>
@@ -4844,7 +4844,7 @@
                 <a:ea typeface="Work Sans" pitchFamily="34" charset="-122"/>
                 <a:cs typeface="Work Sans" pitchFamily="34" charset="-120"/>
               </a:rPr>
-              <a:t>SATIS GROUP — THE NEWSLETTER STUDIO</a:t>
+              <a:t>SATIS GROUP · THE NEWSLETTER STUDIO</a:t>
             </a:r>
             <a:endParaRPr lang="en-US" sz="700" dirty="0"/>
           </a:p>
@@ -4967,7 +4967,7 @@
                 <a:ea typeface="Work Sans" pitchFamily="34" charset="-122"/>
                 <a:cs typeface="Work Sans" pitchFamily="34" charset="-120"/>
               </a:rPr>
-              <a:t>Stories appear in the archive list on the News page the moment they are published — newest at the top — and each story gets its own page and web address, like /news/2026-08-19-your-headline.
+              <a:t>Stories appear in the archive list on the News page the moment they are published, newest at the top, and each story gets its own page and web address, like /news/2026-08-19-your-headline.
 </a:t>
             </a:r>
             <a:pPr indent="0" marL="0">
@@ -5077,7 +5077,7 @@
                 <a:ea typeface="Work Sans" pitchFamily="34" charset="-122"/>
                 <a:cs typeface="Work Sans" pitchFamily="34" charset="-120"/>
               </a:rPr>
-              <a:t>The “What we've been up to” list on /news — newest first, immediately after publishing.</a:t>
+              <a:t>The “What we've been up to” list on /news: newest first, immediately after publishing.</a:t>
             </a:r>
             <a:endParaRPr lang="en-US" sz="850" dirty="0"/>
           </a:p>
@@ -5406,7 +5406,7 @@
                 <a:ea typeface="Work Sans" pitchFamily="34" charset="-122"/>
                 <a:cs typeface="Work Sans" pitchFamily="34" charset="-120"/>
               </a:rPr>
-              <a:t>SATIS GROUP — THE NEWSLETTER STUDIO</a:t>
+              <a:t>SATIS GROUP · THE NEWSLETTER STUDIO</a:t>
             </a:r>
             <a:endParaRPr lang="en-US" sz="700" dirty="0"/>
           </a:p>
@@ -5754,7 +5754,7 @@
                 <a:ea typeface="Work Sans" pitchFamily="34" charset="-122"/>
                 <a:cs typeface="Work Sans" pitchFamily="34" charset="-120"/>
               </a:rPr>
-              <a:t>The headline — short and factual. It becomes the story's web address too.</a:t>
+              <a:t>The headline. Short and factual; it becomes the story's web address too.</a:t>
             </a:r>
             <a:endParaRPr lang="en-US" sz="1000" dirty="0"/>
           </a:p>
@@ -6174,7 +6174,7 @@
                 <a:ea typeface="Work Sans" pitchFamily="34" charset="-122"/>
                 <a:cs typeface="Work Sans" pitchFamily="34" charset="-120"/>
               </a:rPr>
-              <a:t>The story itself, in normal paragraphs — press Enter twice between them.</a:t>
+              <a:t>The story itself, in normal paragraphs. Press Enter twice between them.</a:t>
             </a:r>
             <a:endParaRPr lang="en-US" sz="1000" dirty="0"/>
           </a:p>
@@ -6658,7 +6658,7 @@
                 <a:ea typeface="Work Sans" pitchFamily="34" charset="-122"/>
                 <a:cs typeface="Work Sans" pitchFamily="34" charset="-120"/>
               </a:rPr>
-              <a:t>SATIS GROUP — THE NEWSLETTER STUDIO</a:t>
+              <a:t>SATIS GROUP · THE NEWSLETTER STUDIO</a:t>
             </a:r>
             <a:endParaRPr lang="en-US" sz="700" dirty="0"/>
           </a:p>
@@ -6778,7 +6778,7 @@
                 <a:ea typeface="Work Sans" pitchFamily="34" charset="-122"/>
                 <a:cs typeface="Work Sans" pitchFamily="34" charset="-120"/>
               </a:rPr>
-              <a:t>There is no bold/italic toolbar — the site styles every story for you, so every story matches the house look.</a:t>
+              <a:t>There is no bold/italic toolbar. The site styles every story for you, so every story matches the house look.</a:t>
             </a:r>
             <a:endParaRPr lang="en-US" sz="1150" dirty="0"/>
           </a:p>
@@ -6869,7 +6869,7 @@
                 <a:ea typeface="Work Sans" pitchFamily="34" charset="-122"/>
                 <a:cs typeface="Work Sans" pitchFamily="34" charset="-120"/>
               </a:rPr>
-              <a:t>Press Enter twice — one empty line — between paragraphs. Miss the empty line and they run together into one block.</a:t>
+              <a:t>Press Enter twice (one empty line) between paragraphs. Miss the empty line and they run together into one block.</a:t>
             </a:r>
             <a:endParaRPr lang="en-US" sz="1100" dirty="0"/>
           </a:p>
@@ -7339,7 +7339,7 @@
                 <a:ea typeface="Work Sans" pitchFamily="34" charset="-122"/>
                 <a:cs typeface="Work Sans" pitchFamily="34" charset="-120"/>
               </a:rPr>
-              <a:t>SATIS GROUP — THE NEWSLETTER STUDIO</a:t>
+              <a:t>SATIS GROUP · THE NEWSLETTER STUDIO</a:t>
             </a:r>
             <a:endParaRPr lang="en-US" sz="700" dirty="0"/>
           </a:p>
@@ -7645,7 +7645,7 @@
                 <a:ea typeface="Work Sans" pitchFamily="34" charset="-122"/>
                 <a:cs typeface="Work Sans" pitchFamily="34" charset="-120"/>
               </a:rPr>
-              <a:t>Two confirmations: a message under the form — “Issue published.” with a link — and the story at the top of the Published issues list.</a:t>
+              <a:t>Two confirmations: a message under the form (“Issue published.” with a link) and the story at the top of the Published issues list.</a:t>
             </a:r>
             <a:endParaRPr lang="en-US" sz="1050" dirty="0"/>
           </a:p>
@@ -7785,7 +7785,7 @@
                 <a:ea typeface="Work Sans" pitchFamily="34" charset="-122"/>
                 <a:cs typeface="Work Sans" pitchFamily="34" charset="-120"/>
               </a:rPr>
-              <a:t>Read the live story. Check the headline, the date, and skim the text — typos are far easier to spot on the finished page than in the typing box.</a:t>
+              <a:t>Read the live story. Check the headline, the date, and skim the text. Typos are far easier to spot on the finished page than in the typing box.</a:t>
             </a:r>
             <a:endParaRPr lang="en-US" sz="1050" dirty="0"/>
           </a:p>
@@ -8254,7 +8254,7 @@
                 <a:ea typeface="Work Sans" pitchFamily="34" charset="-122"/>
                 <a:cs typeface="Work Sans" pitchFamily="34" charset="-120"/>
               </a:rPr>
-              <a:t>SATIS GROUP — THE NEWSLETTER STUDIO</a:t>
+              <a:t>SATIS GROUP · THE NEWSLETTER STUDIO</a:t>
             </a:r>
             <a:endParaRPr lang="en-US" sz="700" dirty="0"/>
           </a:p>
@@ -8374,7 +8374,7 @@
                 <a:ea typeface="Work Sans" pitchFamily="34" charset="-122"/>
                 <a:cs typeface="Work Sans" pitchFamily="34" charset="-120"/>
               </a:rPr>
-              <a:t>The studio deliberately refuses to overwrite: publishing again with the same title and date says “An issue named … already exists.” That guard protects live stories — corrections go through Claude instead.</a:t>
+              <a:t>The studio deliberately refuses to overwrite: publishing again with the same title and date says “An issue named … already exists.” That guard protects live stories, so corrections go through Claude instead.</a:t>
             </a:r>
             <a:endParaRPr lang="en-US" sz="1150" dirty="0"/>
           </a:p>
@@ -8472,7 +8472,7 @@
                 <a:ea typeface="Work Sans" pitchFamily="34" charset="-122"/>
                 <a:cs typeface="Work Sans" pitchFamily="34" charset="-120"/>
               </a:rPr>
-              <a:t>Small typo — ask Claude</a:t>
+              <a:t>Small typo? Ask Claude</a:t>
             </a:r>
             <a:endParaRPr lang="en-US" sz="1200" dirty="0"/>
           </a:p>
@@ -8919,7 +8919,7 @@
                 <a:ea typeface="Work Sans" pitchFamily="34" charset="-122"/>
                 <a:cs typeface="Work Sans" pitchFamily="34" charset="-120"/>
               </a:rPr>
-              <a:t>Claude edits the website's master copy from plain-English requests — webinar 01 covers it, and the written chapter is at /admin/guide → “Making changes with Claude”.</a:t>
+              <a:t>Claude edits the website's master copy from plain-English requests. Webinar 01 covers it, and the written chapter is at /admin/guide → “Making changes with Claude”.</a:t>
             </a:r>
             <a:endParaRPr lang="en-US" sz="1100" dirty="0"/>
           </a:p>
@@ -9123,7 +9123,7 @@
                 <a:ea typeface="Work Sans" pitchFamily="34" charset="-122"/>
                 <a:cs typeface="Work Sans" pitchFamily="34" charset="-120"/>
               </a:rPr>
-              <a:t>SATIS GROUP — THE NEWSLETTER STUDIO</a:t>
+              <a:t>SATIS GROUP · THE NEWSLETTER STUDIO</a:t>
             </a:r>
             <a:endParaRPr lang="en-US" sz="700" dirty="0"/>
           </a:p>
@@ -9243,7 +9243,7 @@
                 <a:ea typeface="Work Sans" pitchFamily="34" charset="-122"/>
                 <a:cs typeface="Work Sans" pitchFamily="34" charset="-120"/>
               </a:rPr>
-              <a:t>The live hosting keeps its files read-only — a safety feature of the platform, not a fault. In a writable environment (a Claude session, or the site running locally) the same form saves instantly.</a:t>
+              <a:t>The live hosting keeps its files read-only, a safety feature of the platform, not a fault. In a writable environment (a Claude session, or the site running locally) the same form saves instantly.</a:t>
             </a:r>
             <a:endParaRPr lang="en-US" sz="1150" dirty="0"/>
           </a:p>
@@ -9383,7 +9383,7 @@
                 <a:ea typeface="Work Sans" pitchFamily="34" charset="-122"/>
                 <a:cs typeface="Work Sans" pitchFamily="34" charset="-120"/>
               </a:rPr>
-              <a:t>Nothing is broken and nothing was lost — the site is telling you this story needs to go through the master copy.</a:t>
+              <a:t>Nothing is broken and nothing was lost. The site is telling you this story needs to go through the master copy.</a:t>
             </a:r>
             <a:endParaRPr lang="en-US" sz="1050" dirty="0"/>
           </a:p>
@@ -9523,7 +9523,7 @@
                 <a:ea typeface="Work Sans" pitchFamily="34" charset="-122"/>
                 <a:cs typeface="Work Sans" pitchFamily="34" charset="-120"/>
               </a:rPr>
-              <a:t>Title, date, summary and body — into an email to yourself or a document.</a:t>
+              <a:t>Title, date, summary and body, into an email to yourself or a document.</a:t>
             </a:r>
             <a:endParaRPr lang="en-US" sz="1050" dirty="0"/>
           </a:p>
@@ -9663,7 +9663,7 @@
                 <a:ea typeface="Work Sans" pitchFamily="34" charset="-122"/>
                 <a:cs typeface="Work Sans" pitchFamily="34" charset="-120"/>
               </a:rPr>
-              <a:t>“Publish this news story: [paste your title, date, summary and text], then commit and push.” The story appears after the automatic republish — a few minutes.</a:t>
+              <a:t>“Publish this news story: [paste your title, date, summary and text], then commit and push.” The story appears after the automatic republish, a few minutes later.</a:t>
             </a:r>
             <a:endParaRPr lang="en-US" sz="1050" dirty="0"/>
           </a:p>
@@ -9788,7 +9788,7 @@
                 <a:ea typeface="Work Sans" pitchFamily="34" charset="-122"/>
                 <a:cs typeface="Work Sans" pitchFamily="34" charset="-120"/>
               </a:rPr>
-              <a:t>Every change to the live site goes through the version-tracked master copy — that is what makes stories traceable and recoverable. Webinar 06 explains the machinery.</a:t>
+              <a:t>Every change to the live site goes through the version-tracked master copy. That is what makes stories traceable and recoverable. Webinar 06 explains the machinery.</a:t>
             </a:r>
             <a:endParaRPr lang="en-US" sz="1100" dirty="0"/>
           </a:p>
@@ -9992,7 +9992,7 @@
                 <a:ea typeface="Work Sans" pitchFamily="34" charset="-122"/>
                 <a:cs typeface="Work Sans" pitchFamily="34" charset="-120"/>
               </a:rPr>
-              <a:t>SATIS GROUP — THE NEWSLETTER STUDIO</a:t>
+              <a:t>SATIS GROUP · THE NEWSLETTER STUDIO</a:t>
             </a:r>
             <a:endParaRPr lang="en-US" sz="700" dirty="0"/>
           </a:p>
@@ -10392,7 +10392,7 @@
                 <a:ea typeface="Work Sans" pitchFamily="34" charset="-122"/>
                 <a:cs typeface="Work Sans" pitchFamily="34" charset="-120"/>
               </a:rPr>
-              <a:t>A subscriber section on the admin newsletter page is being rolled out as this deck is written — it shows signups as a live list you can review and use for mailings.</a:t>
+              <a:t>A subscriber section on the admin newsletter page is being rolled out as this deck is written. It shows signups as a live list you can review and use for mailings.</a:t>
             </a:r>
             <a:endParaRPr lang="en-US" sz="1050" dirty="0"/>
           </a:p>
@@ -10532,7 +10532,7 @@
                 <a:ea typeface="Work Sans" pitchFamily="34" charset="-122"/>
                 <a:cs typeface="Work Sans" pitchFamily="34" charset="-120"/>
               </a:rPr>
-              <a:t>Publishing a story does not email anyone automatically. When an issue should reach subscribers, send it from the team mailbox to the list — until a mailing provider is wired in.</a:t>
+              <a:t>Publishing a story does not email anyone automatically. When an issue should reach subscribers, send it from the team mailbox to the list, until a mailing provider is wired in.</a:t>
             </a:r>
             <a:endParaRPr lang="en-US" sz="1050" dirty="0"/>
           </a:p>
@@ -10657,7 +10657,7 @@
                 <a:ea typeface="Work Sans" pitchFamily="34" charset="-122"/>
                 <a:cs typeface="Work Sans" pitchFamily="34" charset="-120"/>
               </a:rPr>
-              <a:t>Until the subscriber section is live in your admin, signups are not stored anywhere — treat the box as decorative and collect addresses another way.</a:t>
+              <a:t>Until the subscriber section is live in your admin, signups are not stored anywhere. Treat the box as decorative and collect addresses another way.</a:t>
             </a:r>
             <a:endParaRPr lang="en-US" sz="1100" dirty="0"/>
           </a:p>
